--- a/A팀.pptx
+++ b/A팀.pptx
@@ -3667,7 +3667,7 @@
           </a:p>
           <a:p>
             <a:r>
-              <a:rPr lang="en-US" sz="1400" b="1">
+              <a:rPr lang="en-US" sz="1400" b="1" dirty="0">
                 <a:solidFill>
                   <a:srgbClr val="FC8181"/>
                 </a:solidFill>
@@ -3677,7 +3677,7 @@
               </a:rPr>
               <a:t>BEFORE</a:t>
             </a:r>
-            <a:endParaRPr lang="af-ZA" sz="1400">
+            <a:endParaRPr lang="af-ZA" sz="1400" dirty="0">
               <a:solidFill>
                 <a:srgbClr val="000000"/>
               </a:solidFill>
@@ -3699,7 +3699,7 @@
           <a:p>
             <a:pPr algn="l"/>
             <a:r>
-              <a:rPr lang="af-ZA" altLang="ko-KR" sz="1400" b="1">
+              <a:rPr lang="af-ZA" altLang="ko-KR" sz="1400" b="1" dirty="0">
                 <a:solidFill>
                   <a:srgbClr val="4FD1C5"/>
                 </a:solidFill>
@@ -3710,7 +3710,7 @@
               <a:t>① addToken() </a:t>
             </a:r>
             <a:r>
-              <a:rPr lang="ko-KR" altLang="en-US" sz="1400" b="1">
+              <a:rPr lang="ko-KR" altLang="en-US" sz="1400" b="1" dirty="0" err="1">
                 <a:solidFill>
                   <a:srgbClr val="4FD1C5"/>
                 </a:solidFill>
@@ -3718,9 +3718,20 @@
                 <a:ea typeface="맑은 고딕"/>
                 <a:cs typeface="Segoe UI"/>
               </a:rPr>
-              <a:t>헬퍼 추출</a:t>
-            </a:r>
-            <a:endParaRPr lang="ko-KR"/>
+              <a:t>헬퍼</a:t>
+            </a:r>
+            <a:r>
+              <a:rPr lang="ko-KR" altLang="en-US" sz="1400" b="1" dirty="0">
+                <a:solidFill>
+                  <a:srgbClr val="4FD1C5"/>
+                </a:solidFill>
+                <a:latin typeface="Segoe UI"/>
+                <a:ea typeface="맑은 고딕"/>
+                <a:cs typeface="Segoe UI"/>
+              </a:rPr>
+              <a:t> 추출</a:t>
+            </a:r>
+            <a:endParaRPr lang="ko-KR" dirty="0"/>
           </a:p>
         </p:txBody>
       </p:sp>
@@ -4127,7 +4138,6 @@
                 <a:solidFill>
                   <a:srgbClr val="4FD1C5"/>
                 </a:solidFill>
-                <a:latin typeface="Segoe UI"/>
               </a:rPr>
               <a:t>① 의미 검사 — DFS</a:t>
             </a:r>
@@ -4140,7 +4150,6 @@
               <a:solidFill>
                 <a:srgbClr val="4FD1C5"/>
               </a:solidFill>
-              <a:latin typeface="Segoe UI"/>
             </a:endParaRPr>
           </a:p>
           <a:p>
@@ -4156,7 +4165,6 @@
                 <a:solidFill>
                   <a:srgbClr val="E8EAF0"/>
                 </a:solidFill>
-                <a:latin typeface="Segoe UI"/>
               </a:rPr>
               <a:t>AST를 재귀 DFS로 순회하며 검사</a:t>
             </a:r>
@@ -4174,7 +4182,6 @@
                 <a:solidFill>
                   <a:srgbClr val="E8EAF0"/>
                 </a:solidFill>
-                <a:latin typeface="Segoe UI"/>
               </a:rPr>
               <a:t>심볼 테이블로 선언/참조 추적</a:t>
             </a:r>
@@ -4192,7 +4199,6 @@
                 <a:solidFill>
                   <a:srgbClr val="E8EAF0"/>
                 </a:solidFill>
-                <a:latin typeface="Segoe UI"/>
               </a:rPr>
               <a:t>실행 전에 오류를 미리 차단</a:t>
             </a:r>
@@ -4209,7 +4215,6 @@
                 <a:solidFill>
                   <a:srgbClr val="4FD1C5"/>
                 </a:solidFill>
-                <a:latin typeface="Consolas"/>
               </a:rPr>
               <a:t>checkNode(node) → DFS(children)</a:t>
             </a:r>
@@ -4275,7 +4280,6 @@
                 <a:solidFill>
                   <a:srgbClr val="63B3ED"/>
                 </a:solidFill>
-                <a:latin typeface="Segoe UI"/>
               </a:rPr>
               <a:t>② </a:t>
             </a:r>
@@ -4284,7 +4288,6 @@
                 <a:solidFill>
                   <a:srgbClr val="63B3ED"/>
                 </a:solidFill>
-                <a:latin typeface="Segoe UI"/>
               </a:rPr>
               <a:t>검사</a:t>
             </a:r>
@@ -4293,7 +4296,6 @@
                 <a:solidFill>
                   <a:srgbClr val="63B3ED"/>
                 </a:solidFill>
-                <a:latin typeface="Segoe UI"/>
               </a:rPr>
               <a:t> </a:t>
             </a:r>
@@ -4302,7 +4304,6 @@
                 <a:solidFill>
                   <a:srgbClr val="63B3ED"/>
                 </a:solidFill>
-                <a:latin typeface="Segoe UI"/>
               </a:rPr>
               <a:t>항목</a:t>
             </a:r>
@@ -4310,7 +4311,6 @@
               <a:solidFill>
                 <a:srgbClr val="63B3ED"/>
               </a:solidFill>
-              <a:latin typeface="Segoe UI"/>
             </a:endParaRPr>
           </a:p>
           <a:p>
@@ -4321,7 +4321,6 @@
               <a:solidFill>
                 <a:srgbClr val="63B3ED"/>
               </a:solidFill>
-              <a:latin typeface="Segoe UI"/>
             </a:endParaRPr>
           </a:p>
           <a:p>
@@ -4337,7 +4336,6 @@
                 <a:solidFill>
                   <a:srgbClr val="E8EAF0"/>
                 </a:solidFill>
-                <a:latin typeface="Segoe UI"/>
               </a:rPr>
               <a:t>중복 선언: 같은 스코프 내 재선언 탐지</a:t>
             </a:r>
@@ -4355,7 +4353,6 @@
                 <a:solidFill>
                   <a:srgbClr val="E8EAF0"/>
                 </a:solidFill>
-                <a:latin typeface="Segoe UI"/>
               </a:rPr>
               <a:t>자기 참조: 선언 중 자기 자신 참조 차단</a:t>
             </a:r>
@@ -4373,7 +4370,6 @@
                 <a:solidFill>
                   <a:srgbClr val="E8EAF0"/>
                 </a:solidFill>
-                <a:latin typeface="Segoe UI"/>
               </a:rPr>
               <a:t>미정의 식별자 사용 검출</a:t>
             </a:r>
@@ -4390,7 +4386,6 @@
                 <a:solidFill>
                   <a:srgbClr val="4FD1C5"/>
                 </a:solidFill>
-                <a:latin typeface="Consolas"/>
               </a:rPr>
               <a:t>var x = x;  // ❌ 자기참조 오류</a:t>
             </a:r>
@@ -5772,7 +5767,7 @@
           <a:p>
             <a:pPr algn="l"/>
             <a:r>
-              <a:rPr lang="ko-KR" altLang="en-US" sz="1400" b="1">
+              <a:rPr lang="ko-KR" altLang="en-US" sz="1400" b="1" dirty="0" err="1">
                 <a:solidFill>
                   <a:srgbClr val="FC8181"/>
                 </a:solidFill>
@@ -5782,6 +5777,14 @@
               </a:rPr>
               <a:t>Before</a:t>
             </a:r>
+            <a:endParaRPr lang="ko-KR" altLang="en-US" sz="1400" b="1" dirty="0">
+              <a:solidFill>
+                <a:srgbClr val="FC8181"/>
+              </a:solidFill>
+              <a:latin typeface="Segoe UI"/>
+              <a:ea typeface="맑은 고딕"/>
+              <a:cs typeface="Segoe UI"/>
+            </a:endParaRPr>
           </a:p>
         </p:txBody>
       </p:sp>
@@ -8008,7 +8011,7 @@
         <p:spPr>
           <a:xfrm>
             <a:off x="6696617" y="2173868"/>
-            <a:ext cx="4572000" cy="304800"/>
+            <a:ext cx="4572000" cy="215444"/>
           </a:xfrm>
           <a:prstGeom prst="rect">
             <a:avLst/>
@@ -8026,7 +8029,7 @@
           <a:p>
             <a:pPr algn="l"/>
             <a:r>
-              <a:rPr lang="af-ZA" altLang="ko-KR" sz="1400" b="1">
+              <a:rPr lang="af-ZA" altLang="ko-KR" sz="1400" b="1" dirty="0">
                 <a:solidFill>
                   <a:srgbClr val="68D391"/>
                 </a:solidFill>
@@ -8035,7 +8038,25 @@
               </a:rPr>
               <a:t>After</a:t>
             </a:r>
-            <a:endParaRPr lang="ko-KR" altLang="en-US" sz="1400" b="1">
+            <a:r>
+              <a:rPr lang="en-US" altLang="ko-KR" sz="1400" b="1" dirty="0">
+                <a:solidFill>
+                  <a:srgbClr val="68D391"/>
+                </a:solidFill>
+                <a:latin typeface="Segoe UI"/>
+              </a:rPr>
+              <a:t> · SRP </a:t>
+            </a:r>
+            <a:r>
+              <a:rPr lang="ko-KR" altLang="en-US" sz="1400" b="1" dirty="0">
+                <a:solidFill>
+                  <a:srgbClr val="68D391"/>
+                </a:solidFill>
+                <a:latin typeface="Segoe UI"/>
+              </a:rPr>
+              <a:t>적용</a:t>
+            </a:r>
+            <a:endParaRPr lang="ko-KR" altLang="en-US" sz="1400" b="1" dirty="0">
               <a:solidFill>
                 <a:srgbClr val="68D391"/>
               </a:solidFill>
@@ -8135,133 +8156,109 @@
           <a:p>
             <a:r>
               <a:rPr lang="ko-KR" altLang="ko-KR" sz="1800" dirty="0">
-                <a:latin typeface="Segoe UI"/>
-                <a:ea typeface="맑은 고딕"/>
+                <a:latin typeface="+mn-ea"/>
               </a:rPr>
               <a:t>▎</a:t>
             </a:r>
             <a:r>
               <a:rPr lang="ko-KR" altLang="en-US" sz="1800" dirty="0">
-                <a:latin typeface="Segoe UI"/>
-                <a:ea typeface="맑은 고딕"/>
+                <a:latin typeface="+mn-ea"/>
               </a:rPr>
               <a:t> </a:t>
             </a:r>
             <a:r>
               <a:rPr lang="en-US" altLang="ko-KR" sz="1400" dirty="0">
-                <a:latin typeface="Segoe UI"/>
-                <a:ea typeface="맑은 고딕"/>
+                <a:latin typeface="+mn-ea"/>
               </a:rPr>
               <a:t>Map</a:t>
             </a:r>
             <a:r>
               <a:rPr lang="ko-KR" altLang="en-US" sz="1400" dirty="0">
-                <a:latin typeface="Segoe UI"/>
-                <a:ea typeface="맑은 고딕"/>
+                <a:latin typeface="+mn-ea"/>
               </a:rPr>
               <a:t>이 </a:t>
             </a:r>
             <a:r>
               <a:rPr lang="en-US" altLang="ko-KR" sz="1400" dirty="0">
-                <a:latin typeface="Segoe UI"/>
-                <a:ea typeface="맑은 고딕"/>
+                <a:latin typeface="+mn-ea"/>
               </a:rPr>
               <a:t>Executor </a:t>
             </a:r>
             <a:r>
               <a:rPr lang="ko-KR" altLang="en-US" sz="1400" dirty="0">
-                <a:latin typeface="Segoe UI"/>
-                <a:ea typeface="맑은 고딕"/>
+                <a:latin typeface="+mn-ea"/>
               </a:rPr>
               <a:t>안에 있어서 </a:t>
             </a:r>
             <a:r>
               <a:rPr lang="ko-KR" altLang="en-US" sz="1400" dirty="0" err="1">
-                <a:latin typeface="Segoe UI"/>
-                <a:ea typeface="맑은 고딕"/>
+                <a:latin typeface="+mn-ea"/>
               </a:rPr>
               <a:t>스코프가</a:t>
             </a:r>
             <a:r>
               <a:rPr lang="ko-KR" altLang="en-US" sz="1400" dirty="0">
-                <a:latin typeface="Segoe UI"/>
-                <a:ea typeface="맑은 고딕"/>
+                <a:latin typeface="+mn-ea"/>
               </a:rPr>
               <a:t> 하나밖에 없습니다</a:t>
             </a:r>
             <a:r>
               <a:rPr lang="en-US" altLang="ko-KR" sz="1400" dirty="0">
-                <a:latin typeface="Segoe UI"/>
-                <a:ea typeface="맑은 고딕"/>
+                <a:latin typeface="+mn-ea"/>
               </a:rPr>
               <a:t>. </a:t>
             </a:r>
             <a:r>
               <a:rPr lang="ko-KR" altLang="en-US" sz="1400" dirty="0">
-                <a:latin typeface="Segoe UI"/>
-                <a:ea typeface="맑은 고딕"/>
+                <a:latin typeface="+mn-ea"/>
               </a:rPr>
               <a:t>블록</a:t>
             </a:r>
             <a:r>
               <a:rPr lang="en-US" altLang="ko-KR" sz="1400" dirty="0">
-                <a:latin typeface="Segoe UI"/>
-                <a:ea typeface="맑은 고딕"/>
+                <a:latin typeface="+mn-ea"/>
               </a:rPr>
               <a:t>({}) </a:t>
             </a:r>
             <a:r>
               <a:rPr lang="ko-KR" altLang="en-US" sz="1400" dirty="0">
-                <a:latin typeface="Segoe UI"/>
-                <a:ea typeface="맑은 고딕"/>
+                <a:latin typeface="+mn-ea"/>
               </a:rPr>
               <a:t>안에 변수를 선언해도 전부 같은 </a:t>
             </a:r>
             <a:r>
               <a:rPr lang="en-US" altLang="ko-KR" sz="1400" dirty="0">
-                <a:latin typeface="Segoe UI"/>
-                <a:ea typeface="맑은 고딕"/>
+                <a:latin typeface="+mn-ea"/>
               </a:rPr>
               <a:t>Map</a:t>
             </a:r>
             <a:r>
               <a:rPr lang="ko-KR" altLang="en-US" sz="1400" dirty="0">
-                <a:latin typeface="Segoe UI"/>
-                <a:ea typeface="맑은 고딕"/>
-              </a:rPr>
-              <a:t>에</a:t>
-            </a:r>
-          </a:p>
-          <a:p>
+                <a:latin typeface="+mn-ea"/>
+              </a:rPr>
+              <a:t>에 들어가고</a:t>
+            </a:r>
+            <a:r>
+              <a:rPr lang="en-US" altLang="ko-KR" sz="1400" dirty="0">
+                <a:latin typeface="+mn-ea"/>
+              </a:rPr>
+              <a:t>, </a:t>
+            </a:r>
             <a:r>
               <a:rPr lang="ko-KR" altLang="en-US" sz="1400" dirty="0">
-                <a:latin typeface="Segoe UI"/>
-                <a:ea typeface="맑은 고딕"/>
-              </a:rPr>
-              <a:t>  들어가고</a:t>
+                <a:latin typeface="+mn-ea"/>
+              </a:rPr>
+              <a:t>블록이 끝나도 변수가 사라지지 않습니다</a:t>
             </a:r>
             <a:r>
               <a:rPr lang="en-US" altLang="ko-KR" sz="1400" dirty="0">
-                <a:latin typeface="Segoe UI"/>
-                <a:ea typeface="맑은 고딕"/>
-              </a:rPr>
-              <a:t>, </a:t>
-            </a:r>
-            <a:r>
-              <a:rPr lang="ko-KR" altLang="en-US" sz="1400" dirty="0">
-                <a:latin typeface="Segoe UI"/>
-                <a:ea typeface="맑은 고딕"/>
-              </a:rPr>
-              <a:t>블록이 끝나도 변수가 사라지지 않습니다</a:t>
-            </a:r>
-            <a:r>
-              <a:rPr lang="en-US" altLang="ko-KR" sz="1400" dirty="0">
-                <a:latin typeface="Segoe UI"/>
-                <a:ea typeface="맑은 고딕"/>
+                <a:latin typeface="+mn-ea"/>
               </a:rPr>
               <a:t>.</a:t>
             </a:r>
-            <a:endParaRPr lang="ko-KR" altLang="en-US" sz="1400" dirty="0"/>
+            <a:endParaRPr lang="ko-KR" altLang="en-US" sz="1400" dirty="0">
+              <a:latin typeface="+mn-ea"/>
+            </a:endParaRPr>
           </a:p>
         </p:txBody>
       </p:sp>
@@ -18067,10 +18064,10 @@
       </p:sp>
       <p:pic>
         <p:nvPicPr>
-          <p:cNvPr id="5" name="그림 4" descr="텍스트, 스크린샷, 폰트, 번호이(가) 표시된 사진&#10;&#10;AI 생성 콘텐츠는 정확하지 않을 수 있습니다.">
+          <p:cNvPr id="6" name="그림 5" descr="텍스트, 스크린샷, 폰트이(가) 표시된 사진&#10;&#10;AI 생성 콘텐츠는 정확하지 않을 수 있습니다.">
             <a:extLst>
               <a:ext uri="{FF2B5EF4-FFF2-40B4-BE49-F238E27FC236}">
-                <a16:creationId xmlns:a16="http://schemas.microsoft.com/office/drawing/2014/main" id="{F65A4541-D8EF-933B-1B26-5B4DBB9D3147}"/>
+                <a16:creationId xmlns:a16="http://schemas.microsoft.com/office/drawing/2014/main" id="{9B0202D4-AA33-198E-B988-BB0413DFA37D}"/>
               </a:ext>
             </a:extLst>
           </p:cNvPr>
@@ -18081,15 +18078,14 @@
         </p:nvPicPr>
         <p:blipFill>
           <a:blip r:embed="rId2"/>
-          <a:srcRect r="142" b="498"/>
           <a:stretch>
             <a:fillRect/>
           </a:stretch>
         </p:blipFill>
         <p:spPr>
           <a:xfrm>
-            <a:off x="6081365" y="2843909"/>
-            <a:ext cx="5818612" cy="2851037"/>
+            <a:off x="765949" y="2843677"/>
+            <a:ext cx="5010150" cy="2851270"/>
           </a:xfrm>
           <a:prstGeom prst="rect">
             <a:avLst/>
@@ -18098,10 +18094,10 @@
       </p:pic>
       <p:pic>
         <p:nvPicPr>
-          <p:cNvPr id="6" name="그림 5" descr="텍스트, 스크린샷, 폰트이(가) 표시된 사진&#10;&#10;AI 생성 콘텐츠는 정확하지 않을 수 있습니다.">
+          <p:cNvPr id="3" name="그림 2">
             <a:extLst>
               <a:ext uri="{FF2B5EF4-FFF2-40B4-BE49-F238E27FC236}">
-                <a16:creationId xmlns:a16="http://schemas.microsoft.com/office/drawing/2014/main" id="{9B0202D4-AA33-198E-B988-BB0413DFA37D}"/>
+                <a16:creationId xmlns:a16="http://schemas.microsoft.com/office/drawing/2014/main" id="{CA6906AE-0518-4347-929A-A72050DD33FF}"/>
               </a:ext>
             </a:extLst>
           </p:cNvPr>
@@ -18118,8 +18114,8 @@
         </p:blipFill>
         <p:spPr>
           <a:xfrm>
-            <a:off x="765949" y="2843677"/>
-            <a:ext cx="5010150" cy="2851270"/>
+            <a:off x="6096000" y="2843676"/>
+            <a:ext cx="5489808" cy="3377829"/>
           </a:xfrm>
           <a:prstGeom prst="rect">
             <a:avLst/>
